--- a/examples/ppt/shapes/shapes-connectors.pptx
+++ b/examples/ppt/shapes/shapes-connectors.pptx
@@ -5,10 +5,10 @@
     <p:sldMasterId xmlns:r="http://schemas.openxmlformats.org/officeDocument/2006/relationships" id="2147483648" r:id="rId1"/>
   </p:sldMasterIdLst>
   <p:sldIdLst>
-    <p:sldId id="256" r:id="R4dfd662735414d1b"/>
-    <p:sldId id="257" r:id="Rc5b561fea1d14f4c"/>
-    <p:sldId id="258" r:id="Re031ea04426746ce"/>
-    <p:sldId id="259" r:id="Rfb6ea1a8b57248be"/>
+    <p:sldId id="256" r:id="R963ef9bd7c14438c"/>
+    <p:sldId id="257" r:id="Re5d26a97c62d461f"/>
+    <p:sldId id="258" r:id="Rfd1689456f5b41da"/>
+    <p:sldId id="259" r:id="R69e8ae410777403c"/>
   </p:sldIdLst>
   <p:sldSz cx="12192000" cy="6858000"/>
   <p:notesSz cx="6858000" cy="9144000"/>
@@ -283,7 +283,7 @@
 </file>
 
 <file path=ppt/slideMasters/slideMaster1.xml><?xml version="1.0" encoding="utf-8"?>
-<p:sldMaster xmlns:p="http://schemas.openxmlformats.org/presentationml/2006/main">
+<p:sldMaster xmlns:r="http://schemas.openxmlformats.org/officeDocument/2006/relationships" xmlns:p="http://schemas.openxmlformats.org/presentationml/2006/main">
   <p:cSld>
     <p:spTree>
       <p:nvGrpSpPr>
